--- a/ARIMA_HJ/arima plots.pptx
+++ b/ARIMA_HJ/arima plots.pptx
@@ -6,10 +6,11 @@
   </p:sldMasterIdLst>
   <p:sldIdLst>
     <p:sldId id="257" r:id="rId2"/>
-    <p:sldId id="260" r:id="rId3"/>
-    <p:sldId id="278" r:id="rId4"/>
-    <p:sldId id="279" r:id="rId5"/>
-    <p:sldId id="280" r:id="rId6"/>
+    <p:sldId id="281" r:id="rId3"/>
+    <p:sldId id="260" r:id="rId4"/>
+    <p:sldId id="278" r:id="rId5"/>
+    <p:sldId id="279" r:id="rId6"/>
+    <p:sldId id="280" r:id="rId7"/>
   </p:sldIdLst>
   <p:sldSz cx="16216313" cy="6858000"/>
   <p:notesSz cx="6858000" cy="9144000"/>
@@ -3096,6 +3097,105 @@
       </p:grpSpPr>
       <p:pic>
         <p:nvPicPr>
+          <p:cNvPr id="3" name="Picture 2" descr="A graph showing the number of changes in the forecast&#10;&#10;AI-generated content may be incorrect.">
+            <a:extLst>
+              <a:ext uri="{FF2B5EF4-FFF2-40B4-BE49-F238E27FC236}">
+                <a16:creationId xmlns:a16="http://schemas.microsoft.com/office/drawing/2014/main" id="{E4FD16C9-AEFA-E673-6C3F-75C222BC8668}"/>
+              </a:ext>
+            </a:extLst>
+          </p:cNvPr>
+          <p:cNvPicPr>
+            <a:picLocks noChangeAspect="1"/>
+          </p:cNvPicPr>
+          <p:nvPr/>
+        </p:nvPicPr>
+        <p:blipFill>
+          <a:blip r:embed="rId2"/>
+          <a:stretch>
+            <a:fillRect/>
+          </a:stretch>
+        </p:blipFill>
+        <p:spPr>
+          <a:xfrm>
+            <a:off x="4221956" y="1130300"/>
+            <a:ext cx="7772400" cy="4799728"/>
+          </a:xfrm>
+          <a:prstGeom prst="rect">
+            <a:avLst/>
+          </a:prstGeom>
+        </p:spPr>
+      </p:pic>
+      <p:sp>
+        <p:nvSpPr>
+          <p:cNvPr id="4" name="TextBox 3">
+            <a:extLst>
+              <a:ext uri="{FF2B5EF4-FFF2-40B4-BE49-F238E27FC236}">
+                <a16:creationId xmlns:a16="http://schemas.microsoft.com/office/drawing/2014/main" id="{B881F260-0578-F75F-3984-3263197648B2}"/>
+              </a:ext>
+            </a:extLst>
+          </p:cNvPr>
+          <p:cNvSpPr txBox="1"/>
+          <p:nvPr/>
+        </p:nvSpPr>
+        <p:spPr>
+          <a:xfrm rot="16200000">
+            <a:off x="4007544" y="3259724"/>
+            <a:ext cx="736600" cy="338554"/>
+          </a:xfrm>
+          <a:prstGeom prst="rect">
+            <a:avLst/>
+          </a:prstGeom>
+          <a:noFill/>
+        </p:spPr>
+        <p:txBody>
+          <a:bodyPr wrap="square" rtlCol="0">
+            <a:spAutoFit/>
+          </a:bodyPr>
+          <a:lstStyle/>
+          <a:p>
+            <a:pPr algn="ctr"/>
+            <a:r>
+              <a:rPr lang="en-US" sz="1600" b="1" dirty="0">
+                <a:latin typeface="Arial" panose="020B0604020202020204" pitchFamily="34" charset="0"/>
+                <a:cs typeface="Arial" panose="020B0604020202020204" pitchFamily="34" charset="0"/>
+              </a:rPr>
+              <a:t>AQI</a:t>
+            </a:r>
+          </a:p>
+        </p:txBody>
+      </p:sp>
+    </p:spTree>
+    <p:extLst>
+      <p:ext uri="{BB962C8B-B14F-4D97-AF65-F5344CB8AC3E}">
+        <p14:creationId xmlns:p14="http://schemas.microsoft.com/office/powerpoint/2010/main" val="1509841187"/>
+      </p:ext>
+    </p:extLst>
+  </p:cSld>
+  <p:clrMapOvr>
+    <a:masterClrMapping/>
+  </p:clrMapOvr>
+</p:sld>
+</file>
+
+<file path=ppt/slides/slide3.xml><?xml version="1.0" encoding="utf-8"?>
+<p:sld xmlns:a="http://schemas.openxmlformats.org/drawingml/2006/main" xmlns:r="http://schemas.openxmlformats.org/officeDocument/2006/relationships" xmlns:p="http://schemas.openxmlformats.org/presentationml/2006/main">
+  <p:cSld>
+    <p:spTree>
+      <p:nvGrpSpPr>
+        <p:cNvPr id="1" name=""/>
+        <p:cNvGrpSpPr/>
+        <p:nvPr/>
+      </p:nvGrpSpPr>
+      <p:grpSpPr>
+        <a:xfrm>
+          <a:off x="0" y="0"/>
+          <a:ext cx="0" cy="0"/>
+          <a:chOff x="0" y="0"/>
+          <a:chExt cx="0" cy="0"/>
+        </a:xfrm>
+      </p:grpSpPr>
+      <p:pic>
+        <p:nvPicPr>
           <p:cNvPr id="8" name="Picture 7" descr="A blue dotted line with a red line&#10;&#10;AI-generated content may be incorrect.">
             <a:extLst>
               <a:ext uri="{FF2B5EF4-FFF2-40B4-BE49-F238E27FC236}">
@@ -3194,7 +3294,7 @@
 </p:sld>
 </file>
 
-<file path=ppt/slides/slide3.xml><?xml version="1.0" encoding="utf-8"?>
+<file path=ppt/slides/slide4.xml><?xml version="1.0" encoding="utf-8"?>
 <p:sld xmlns:a="http://schemas.openxmlformats.org/drawingml/2006/main" xmlns:r="http://schemas.openxmlformats.org/officeDocument/2006/relationships" xmlns:p="http://schemas.openxmlformats.org/presentationml/2006/main" show="0">
   <p:cSld>
     <p:spTree>
@@ -3314,7 +3414,7 @@
 </p:sld>
 </file>
 
-<file path=ppt/slides/slide4.xml><?xml version="1.0" encoding="utf-8"?>
+<file path=ppt/slides/slide5.xml><?xml version="1.0" encoding="utf-8"?>
 <p:sld xmlns:a="http://schemas.openxmlformats.org/drawingml/2006/main" xmlns:r="http://schemas.openxmlformats.org/officeDocument/2006/relationships" xmlns:p="http://schemas.openxmlformats.org/presentationml/2006/main">
   <p:cSld>
     <p:spTree>
@@ -3434,7 +3534,7 @@
 </p:sld>
 </file>
 
-<file path=ppt/slides/slide5.xml><?xml version="1.0" encoding="utf-8"?>
+<file path=ppt/slides/slide6.xml><?xml version="1.0" encoding="utf-8"?>
 <p:sld xmlns:a="http://schemas.openxmlformats.org/drawingml/2006/main" xmlns:r="http://schemas.openxmlformats.org/officeDocument/2006/relationships" xmlns:p="http://schemas.openxmlformats.org/presentationml/2006/main">
   <p:cSld>
     <p:spTree>
